--- a/その他/新入生ガイダンス/02_大好きなものプレゼン選手権.pptx
+++ b/その他/新入生ガイダンス/02_大好きなものプレゼン選手権.pptx
@@ -259,7 +259,7 @@
           <a:p>
             <a:fld id="{E9CC885B-4903-4D54-9A93-00025F12DED9}" type="datetimeFigureOut">
               <a:rPr kumimoji="1" lang="ja-JP" altLang="en-US" smtClean="0"/>
-              <a:t>2026/3/18</a:t>
+              <a:t>2026/3/22</a:t>
             </a:fld>
             <a:endParaRPr kumimoji="1" lang="ja-JP" altLang="en-US"/>
           </a:p>
@@ -489,7 +489,7 @@
           <a:p>
             <a:fld id="{E9CC885B-4903-4D54-9A93-00025F12DED9}" type="datetimeFigureOut">
               <a:rPr kumimoji="1" lang="ja-JP" altLang="en-US" smtClean="0"/>
-              <a:t>2026/3/18</a:t>
+              <a:t>2026/3/22</a:t>
             </a:fld>
             <a:endParaRPr kumimoji="1" lang="ja-JP" altLang="en-US"/>
           </a:p>
@@ -729,7 +729,7 @@
           <a:p>
             <a:fld id="{E9CC885B-4903-4D54-9A93-00025F12DED9}" type="datetimeFigureOut">
               <a:rPr kumimoji="1" lang="ja-JP" altLang="en-US" smtClean="0"/>
-              <a:t>2026/3/18</a:t>
+              <a:t>2026/3/22</a:t>
             </a:fld>
             <a:endParaRPr kumimoji="1" lang="ja-JP" altLang="en-US"/>
           </a:p>
@@ -959,7 +959,7 @@
           <a:p>
             <a:fld id="{E9CC885B-4903-4D54-9A93-00025F12DED9}" type="datetimeFigureOut">
               <a:rPr kumimoji="1" lang="ja-JP" altLang="en-US" smtClean="0"/>
-              <a:t>2026/3/18</a:t>
+              <a:t>2026/3/22</a:t>
             </a:fld>
             <a:endParaRPr kumimoji="1" lang="ja-JP" altLang="en-US"/>
           </a:p>
@@ -1234,7 +1234,7 @@
           <a:p>
             <a:fld id="{E9CC885B-4903-4D54-9A93-00025F12DED9}" type="datetimeFigureOut">
               <a:rPr kumimoji="1" lang="ja-JP" altLang="en-US" smtClean="0"/>
-              <a:t>2026/3/18</a:t>
+              <a:t>2026/3/22</a:t>
             </a:fld>
             <a:endParaRPr kumimoji="1" lang="ja-JP" altLang="en-US"/>
           </a:p>
@@ -1563,7 +1563,7 @@
           <a:p>
             <a:fld id="{E9CC885B-4903-4D54-9A93-00025F12DED9}" type="datetimeFigureOut">
               <a:rPr kumimoji="1" lang="ja-JP" altLang="en-US" smtClean="0"/>
-              <a:t>2026/3/18</a:t>
+              <a:t>2026/3/22</a:t>
             </a:fld>
             <a:endParaRPr kumimoji="1" lang="ja-JP" altLang="en-US"/>
           </a:p>
@@ -2039,7 +2039,7 @@
           <a:p>
             <a:fld id="{E9CC885B-4903-4D54-9A93-00025F12DED9}" type="datetimeFigureOut">
               <a:rPr kumimoji="1" lang="ja-JP" altLang="en-US" smtClean="0"/>
-              <a:t>2026/3/18</a:t>
+              <a:t>2026/3/22</a:t>
             </a:fld>
             <a:endParaRPr kumimoji="1" lang="ja-JP" altLang="en-US"/>
           </a:p>
@@ -2180,7 +2180,7 @@
           <a:p>
             <a:fld id="{E9CC885B-4903-4D54-9A93-00025F12DED9}" type="datetimeFigureOut">
               <a:rPr kumimoji="1" lang="ja-JP" altLang="en-US" smtClean="0"/>
-              <a:t>2026/3/18</a:t>
+              <a:t>2026/3/22</a:t>
             </a:fld>
             <a:endParaRPr kumimoji="1" lang="ja-JP" altLang="en-US"/>
           </a:p>
@@ -2293,7 +2293,7 @@
           <a:p>
             <a:fld id="{E9CC885B-4903-4D54-9A93-00025F12DED9}" type="datetimeFigureOut">
               <a:rPr kumimoji="1" lang="ja-JP" altLang="en-US" smtClean="0"/>
-              <a:t>2026/3/18</a:t>
+              <a:t>2026/3/22</a:t>
             </a:fld>
             <a:endParaRPr kumimoji="1" lang="ja-JP" altLang="en-US"/>
           </a:p>
@@ -2636,7 +2636,7 @@
           <a:p>
             <a:fld id="{E9CC885B-4903-4D54-9A93-00025F12DED9}" type="datetimeFigureOut">
               <a:rPr kumimoji="1" lang="ja-JP" altLang="en-US" smtClean="0"/>
-              <a:t>2026/3/18</a:t>
+              <a:t>2026/3/22</a:t>
             </a:fld>
             <a:endParaRPr kumimoji="1" lang="ja-JP" altLang="en-US"/>
           </a:p>
@@ -2924,7 +2924,7 @@
           <a:p>
             <a:fld id="{E9CC885B-4903-4D54-9A93-00025F12DED9}" type="datetimeFigureOut">
               <a:rPr kumimoji="1" lang="ja-JP" altLang="en-US" smtClean="0"/>
-              <a:t>2026/3/18</a:t>
+              <a:t>2026/3/22</a:t>
             </a:fld>
             <a:endParaRPr kumimoji="1" lang="ja-JP" altLang="en-US"/>
           </a:p>
@@ -3197,7 +3197,7 @@
           <a:p>
             <a:fld id="{E9CC885B-4903-4D54-9A93-00025F12DED9}" type="datetimeFigureOut">
               <a:rPr kumimoji="1" lang="ja-JP" altLang="en-US" smtClean="0"/>
-              <a:t>2026/3/18</a:t>
+              <a:t>2026/3/22</a:t>
             </a:fld>
             <a:endParaRPr kumimoji="1" lang="ja-JP" altLang="en-US"/>
           </a:p>
@@ -3671,7 +3671,7 @@
         <p:spPr>
           <a:xfrm>
             <a:off x="567542" y="1216429"/>
-            <a:ext cx="7571303" cy="3416320"/>
+            <a:ext cx="7571303" cy="4154984"/>
           </a:xfrm>
           <a:prstGeom prst="rect">
             <a:avLst/>
@@ -3795,6 +3795,70 @@
             </a:r>
           </a:p>
           <a:p>
+            <a:r>
+              <a:rPr lang="ja-JP" altLang="en-US" sz="2400" dirty="0">
+                <a:latin typeface="HGS創英角ｺﾞｼｯｸUB" panose="020B0900000000000000" pitchFamily="50" charset="-128"/>
+                <a:ea typeface="HGS創英角ｺﾞｼｯｸUB" panose="020B0900000000000000" pitchFamily="50" charset="-128"/>
+              </a:rPr>
+              <a:t>・資料の形式はなんでも</a:t>
+            </a:r>
+            <a:r>
+              <a:rPr lang="en-US" altLang="ja-JP" sz="2400" dirty="0">
+                <a:latin typeface="HGS創英角ｺﾞｼｯｸUB" panose="020B0900000000000000" pitchFamily="50" charset="-128"/>
+                <a:ea typeface="HGS創英角ｺﾞｼｯｸUB" panose="020B0900000000000000" pitchFamily="50" charset="-128"/>
+              </a:rPr>
+              <a:t>OK</a:t>
+            </a:r>
+          </a:p>
+          <a:p>
+            <a:r>
+              <a:rPr lang="ja-JP" altLang="en-US" sz="2400" dirty="0">
+                <a:latin typeface="HGS創英角ｺﾞｼｯｸUB" panose="020B0900000000000000" pitchFamily="50" charset="-128"/>
+                <a:ea typeface="HGS創英角ｺﾞｼｯｸUB" panose="020B0900000000000000" pitchFamily="50" charset="-128"/>
+              </a:rPr>
+              <a:t>　・エクセル </a:t>
+            </a:r>
+            <a:r>
+              <a:rPr lang="en-US" altLang="ja-JP" sz="2400" dirty="0">
+                <a:latin typeface="HGS創英角ｺﾞｼｯｸUB" panose="020B0900000000000000" pitchFamily="50" charset="-128"/>
+                <a:ea typeface="HGS創英角ｺﾞｼｯｸUB" panose="020B0900000000000000" pitchFamily="50" charset="-128"/>
+              </a:rPr>
+              <a:t>/ </a:t>
+            </a:r>
+            <a:r>
+              <a:rPr lang="ja-JP" altLang="en-US" sz="2400" dirty="0">
+                <a:latin typeface="HGS創英角ｺﾞｼｯｸUB" panose="020B0900000000000000" pitchFamily="50" charset="-128"/>
+                <a:ea typeface="HGS創英角ｺﾞｼｯｸUB" panose="020B0900000000000000" pitchFamily="50" charset="-128"/>
+              </a:rPr>
+              <a:t>ワード </a:t>
+            </a:r>
+            <a:r>
+              <a:rPr lang="en-US" altLang="ja-JP" sz="2400" dirty="0">
+                <a:latin typeface="HGS創英角ｺﾞｼｯｸUB" panose="020B0900000000000000" pitchFamily="50" charset="-128"/>
+                <a:ea typeface="HGS創英角ｺﾞｼｯｸUB" panose="020B0900000000000000" pitchFamily="50" charset="-128"/>
+              </a:rPr>
+              <a:t>/ </a:t>
+            </a:r>
+            <a:r>
+              <a:rPr lang="ja-JP" altLang="en-US" sz="2400" dirty="0">
+                <a:latin typeface="HGS創英角ｺﾞｼｯｸUB" panose="020B0900000000000000" pitchFamily="50" charset="-128"/>
+                <a:ea typeface="HGS創英角ｺﾞｼｯｸUB" panose="020B0900000000000000" pitchFamily="50" charset="-128"/>
+              </a:rPr>
+              <a:t>パワーポイント など</a:t>
+            </a:r>
+            <a:endParaRPr lang="en-US" altLang="ja-JP" sz="2400" dirty="0">
+              <a:latin typeface="HGS創英角ｺﾞｼｯｸUB" panose="020B0900000000000000" pitchFamily="50" charset="-128"/>
+              <a:ea typeface="HGS創英角ｺﾞｼｯｸUB" panose="020B0900000000000000" pitchFamily="50" charset="-128"/>
+            </a:endParaRPr>
+          </a:p>
+          <a:p>
+            <a:r>
+              <a:rPr lang="ja-JP" altLang="en-US" sz="2400">
+                <a:latin typeface="HGS創英角ｺﾞｼｯｸUB" panose="020B0900000000000000" pitchFamily="50" charset="-128"/>
+                <a:ea typeface="HGS創英角ｺﾞｼｯｸUB" panose="020B0900000000000000" pitchFamily="50" charset="-128"/>
+              </a:rPr>
+              <a:t>　</a:t>
+            </a:r>
             <a:endParaRPr lang="en-US" altLang="ja-JP" sz="2400" dirty="0">
               <a:latin typeface="HGS創英角ｺﾞｼｯｸUB" panose="020B0900000000000000" pitchFamily="50" charset="-128"/>
               <a:ea typeface="HGS創英角ｺﾞｼｯｸUB" panose="020B0900000000000000" pitchFamily="50" charset="-128"/>
